--- a/Last/LEC/01-2_Benchmarking.pptx
+++ b/Last/LEC/01-2_Benchmarking.pptx
@@ -5,22 +5,21 @@
     <p:sldMasterId id="2147483648" r:id="rId1"/>
   </p:sldMasterIdLst>
   <p:notesMasterIdLst>
-    <p:notesMasterId r:id="rId15"/>
+    <p:notesMasterId r:id="rId14"/>
   </p:notesMasterIdLst>
   <p:sldIdLst>
     <p:sldId id="256" r:id="rId2"/>
-    <p:sldId id="466" r:id="rId3"/>
-    <p:sldId id="425" r:id="rId4"/>
-    <p:sldId id="467" r:id="rId5"/>
-    <p:sldId id="412" r:id="rId6"/>
-    <p:sldId id="444" r:id="rId7"/>
-    <p:sldId id="468" r:id="rId8"/>
-    <p:sldId id="469" r:id="rId9"/>
-    <p:sldId id="470" r:id="rId10"/>
-    <p:sldId id="471" r:id="rId11"/>
-    <p:sldId id="432" r:id="rId12"/>
-    <p:sldId id="433" r:id="rId13"/>
-    <p:sldId id="472" r:id="rId14"/>
+    <p:sldId id="425" r:id="rId3"/>
+    <p:sldId id="467" r:id="rId4"/>
+    <p:sldId id="412" r:id="rId5"/>
+    <p:sldId id="444" r:id="rId6"/>
+    <p:sldId id="468" r:id="rId7"/>
+    <p:sldId id="469" r:id="rId8"/>
+    <p:sldId id="470" r:id="rId9"/>
+    <p:sldId id="471" r:id="rId10"/>
+    <p:sldId id="432" r:id="rId11"/>
+    <p:sldId id="433" r:id="rId12"/>
+    <p:sldId id="472" r:id="rId13"/>
   </p:sldIdLst>
   <p:sldSz cx="12192000" cy="6858000"/>
   <p:notesSz cx="6858000" cy="9144000"/>
@@ -125,7 +124,6 @@
         <p14:section name="Раздел по умолчанию" id="{201EE05C-F9E4-4BBB-A5C1-9C9F75E33B4A}">
           <p14:sldIdLst>
             <p14:sldId id="256"/>
-            <p14:sldId id="466"/>
             <p14:sldId id="425"/>
             <p14:sldId id="467"/>
             <p14:sldId id="412"/>
@@ -230,7 +228,7 @@
           <a:p>
             <a:fld id="{C730246F-5962-E14A-AAF2-985CCFDAC345}" type="datetimeFigureOut">
               <a:rPr lang="ru-RU" smtClean="0"/>
-              <a:t>04.05.2026</a:t>
+              <a:t>25.09.2026</a:t>
             </a:fld>
             <a:endParaRPr lang="ru-RU"/>
           </a:p>
@@ -562,7 +560,7 @@
           <a:p>
             <a:fld id="{9DA1EE30-E435-D745-B23A-FF31C831763F}" type="slidenum">
               <a:rPr lang="ru-RU" smtClean="0"/>
-              <a:t>6</a:t>
+              <a:t>5</a:t>
             </a:fld>
             <a:endParaRPr lang="ru-RU"/>
           </a:p>
@@ -650,7 +648,7 @@
           <a:p>
             <a:fld id="{9DA1EE30-E435-D745-B23A-FF31C831763F}" type="slidenum">
               <a:rPr lang="ru-RU" smtClean="0"/>
-              <a:t>7</a:t>
+              <a:t>6</a:t>
             </a:fld>
             <a:endParaRPr lang="ru-RU"/>
           </a:p>
@@ -734,7 +732,7 @@
           <a:p>
             <a:fld id="{9DA1EE30-E435-D745-B23A-FF31C831763F}" type="slidenum">
               <a:rPr lang="ru-RU" smtClean="0"/>
-              <a:t>9</a:t>
+              <a:t>8</a:t>
             </a:fld>
             <a:endParaRPr lang="ru-RU"/>
           </a:p>
@@ -818,7 +816,7 @@
           <a:p>
             <a:fld id="{9DA1EE30-E435-D745-B23A-FF31C831763F}" type="slidenum">
               <a:rPr lang="ru-RU" smtClean="0"/>
-              <a:t>10</a:t>
+              <a:t>9</a:t>
             </a:fld>
             <a:endParaRPr lang="ru-RU"/>
           </a:p>
@@ -986,7 +984,7 @@
           <a:p>
             <a:fld id="{44343DC6-30E4-4569-999A-C703F926F2AF}" type="datetimeFigureOut">
               <a:rPr lang="en-US" smtClean="0"/>
-              <a:t>5/4/2026</a:t>
+              <a:t>9/25/2026</a:t>
             </a:fld>
             <a:endParaRPr lang="en-US"/>
           </a:p>
@@ -1186,7 +1184,7 @@
           <a:p>
             <a:fld id="{44343DC6-30E4-4569-999A-C703F926F2AF}" type="datetimeFigureOut">
               <a:rPr lang="en-US" smtClean="0"/>
-              <a:t>5/4/2026</a:t>
+              <a:t>9/25/2026</a:t>
             </a:fld>
             <a:endParaRPr lang="en-US"/>
           </a:p>
@@ -1396,7 +1394,7 @@
           <a:p>
             <a:fld id="{44343DC6-30E4-4569-999A-C703F926F2AF}" type="datetimeFigureOut">
               <a:rPr lang="en-US" smtClean="0"/>
-              <a:t>5/4/2026</a:t>
+              <a:t>9/25/2026</a:t>
             </a:fld>
             <a:endParaRPr lang="en-US"/>
           </a:p>
@@ -1596,7 +1594,7 @@
           <a:p>
             <a:fld id="{44343DC6-30E4-4569-999A-C703F926F2AF}" type="datetimeFigureOut">
               <a:rPr lang="en-US" smtClean="0"/>
-              <a:t>5/4/2026</a:t>
+              <a:t>9/25/2026</a:t>
             </a:fld>
             <a:endParaRPr lang="en-US"/>
           </a:p>
@@ -1872,7 +1870,7 @@
           <a:p>
             <a:fld id="{44343DC6-30E4-4569-999A-C703F926F2AF}" type="datetimeFigureOut">
               <a:rPr lang="en-US" smtClean="0"/>
-              <a:t>5/4/2026</a:t>
+              <a:t>9/25/2026</a:t>
             </a:fld>
             <a:endParaRPr lang="en-US"/>
           </a:p>
@@ -2140,7 +2138,7 @@
           <a:p>
             <a:fld id="{44343DC6-30E4-4569-999A-C703F926F2AF}" type="datetimeFigureOut">
               <a:rPr lang="en-US" smtClean="0"/>
-              <a:t>5/4/2026</a:t>
+              <a:t>9/25/2026</a:t>
             </a:fld>
             <a:endParaRPr lang="en-US"/>
           </a:p>
@@ -2555,7 +2553,7 @@
           <a:p>
             <a:fld id="{44343DC6-30E4-4569-999A-C703F926F2AF}" type="datetimeFigureOut">
               <a:rPr lang="en-US" smtClean="0"/>
-              <a:t>5/4/2026</a:t>
+              <a:t>9/25/2026</a:t>
             </a:fld>
             <a:endParaRPr lang="en-US"/>
           </a:p>
@@ -2697,7 +2695,7 @@
           <a:p>
             <a:fld id="{44343DC6-30E4-4569-999A-C703F926F2AF}" type="datetimeFigureOut">
               <a:rPr lang="en-US" smtClean="0"/>
-              <a:t>5/4/2026</a:t>
+              <a:t>9/25/2026</a:t>
             </a:fld>
             <a:endParaRPr lang="en-US"/>
           </a:p>
@@ -2810,7 +2808,7 @@
           <a:p>
             <a:fld id="{44343DC6-30E4-4569-999A-C703F926F2AF}" type="datetimeFigureOut">
               <a:rPr lang="en-US" smtClean="0"/>
-              <a:t>5/4/2026</a:t>
+              <a:t>9/25/2026</a:t>
             </a:fld>
             <a:endParaRPr lang="en-US"/>
           </a:p>
@@ -3123,7 +3121,7 @@
           <a:p>
             <a:fld id="{44343DC6-30E4-4569-999A-C703F926F2AF}" type="datetimeFigureOut">
               <a:rPr lang="en-US" smtClean="0"/>
-              <a:t>5/4/2026</a:t>
+              <a:t>9/25/2026</a:t>
             </a:fld>
             <a:endParaRPr lang="en-US"/>
           </a:p>
@@ -3412,7 +3410,7 @@
           <a:p>
             <a:fld id="{44343DC6-30E4-4569-999A-C703F926F2AF}" type="datetimeFigureOut">
               <a:rPr lang="en-US" smtClean="0"/>
-              <a:t>5/4/2026</a:t>
+              <a:t>9/25/2026</a:t>
             </a:fld>
             <a:endParaRPr lang="en-US"/>
           </a:p>
@@ -3655,7 +3653,7 @@
           <a:p>
             <a:fld id="{44343DC6-30E4-4569-999A-C703F926F2AF}" type="datetimeFigureOut">
               <a:rPr lang="en-US" smtClean="0"/>
-              <a:t>5/4/2026</a:t>
+              <a:t>9/25/2026</a:t>
             </a:fld>
             <a:endParaRPr lang="en-US"/>
           </a:p>
@@ -4096,7 +4094,7 @@
         </p:spPr>
         <p:txBody>
           <a:bodyPr>
-            <a:normAutofit/>
+            <a:normAutofit fontScale="90000"/>
           </a:bodyPr>
           <a:lstStyle/>
           <a:p>
@@ -4106,7 +4104,15 @@
             </a:r>
             <a:r>
               <a:rPr lang="ru-RU" sz="8000" b="1" dirty="0" smtClean="0"/>
-              <a:t>. Основные понятия, разложение ВР</a:t>
+              <a:t>. Основные понятия, </a:t>
+            </a:r>
+            <a:r>
+              <a:rPr lang="ru-RU" sz="8000" b="1" dirty="0" err="1" smtClean="0"/>
+              <a:t>бенчмарки</a:t>
+            </a:r>
+            <a:r>
+              <a:rPr lang="ru-RU" sz="8000" b="1" dirty="0" smtClean="0"/>
+              <a:t> предсказания ВР, наивные методы</a:t>
             </a:r>
             <a:endParaRPr lang="en-US" sz="8000" b="1" dirty="0"/>
           </a:p>
@@ -4151,189 +4157,6 @@
       </p:grpSpPr>
       <p:sp>
         <p:nvSpPr>
-          <p:cNvPr id="2" name="Заголовок 1">
-            <a:extLst>
-              <a:ext uri="{FF2B5EF4-FFF2-40B4-BE49-F238E27FC236}">
-                <a16:creationId xmlns:a16="http://schemas.microsoft.com/office/drawing/2014/main" id="{3FB6B433-AB20-4BD4-8E77-84B856A5D608}"/>
-              </a:ext>
-            </a:extLst>
-          </p:cNvPr>
-          <p:cNvSpPr>
-            <a:spLocks noGrp="1"/>
-          </p:cNvSpPr>
-          <p:nvPr>
-            <p:ph type="title"/>
-          </p:nvPr>
-        </p:nvSpPr>
-        <p:spPr>
-          <a:xfrm>
-            <a:off x="323849" y="161366"/>
-            <a:ext cx="10515600" cy="806450"/>
-          </a:xfrm>
-        </p:spPr>
-        <p:txBody>
-          <a:bodyPr>
-            <a:normAutofit/>
-          </a:bodyPr>
-          <a:lstStyle/>
-          <a:p>
-            <a:pPr algn="ctr"/>
-            <a:r>
-              <a:rPr lang="ru-RU" b="1" dirty="0"/>
-              <a:t>Наивное предсказание </a:t>
-            </a:r>
-          </a:p>
-        </p:txBody>
-      </p:sp>
-      <p:pic>
-        <p:nvPicPr>
-          <p:cNvPr id="1026" name="Picture 2" descr="Forecasts of Australian quarterly beer production."/>
-          <p:cNvPicPr>
-            <a:picLocks noChangeAspect="1" noChangeArrowheads="1"/>
-          </p:cNvPicPr>
-          <p:nvPr/>
-        </p:nvPicPr>
-        <p:blipFill>
-          <a:blip r:embed="rId3">
-            <a:extLst>
-              <a:ext uri="{28A0092B-C50C-407E-A947-70E740481C1C}">
-                <a14:useLocalDpi xmlns:a14="http://schemas.microsoft.com/office/drawing/2010/main" val="0"/>
-              </a:ext>
-            </a:extLst>
-          </a:blip>
-          <a:srcRect/>
-          <a:stretch>
-            <a:fillRect/>
-          </a:stretch>
-        </p:blipFill>
-        <p:spPr bwMode="auto">
-          <a:xfrm>
-            <a:off x="5381625" y="967816"/>
-            <a:ext cx="6661150" cy="3330575"/>
-          </a:xfrm>
-          <a:prstGeom prst="rect">
-            <a:avLst/>
-          </a:prstGeom>
-          <a:noFill/>
-          <a:extLst>
-            <a:ext uri="{909E8E84-426E-40DD-AFC4-6F175D3DCCD1}">
-              <a14:hiddenFill xmlns:a14="http://schemas.microsoft.com/office/drawing/2010/main">
-                <a:solidFill>
-                  <a:srgbClr val="FFFFFF"/>
-                </a:solidFill>
-              </a14:hiddenFill>
-            </a:ext>
-          </a:extLst>
-        </p:spPr>
-      </p:pic>
-      <p:pic>
-        <p:nvPicPr>
-          <p:cNvPr id="1028" name="Picture 4" descr="Forecasts based on Google's daily closing stock price in 2015."/>
-          <p:cNvPicPr>
-            <a:picLocks noChangeAspect="1" noChangeArrowheads="1"/>
-          </p:cNvPicPr>
-          <p:nvPr/>
-        </p:nvPicPr>
-        <p:blipFill>
-          <a:blip r:embed="rId4">
-            <a:extLst>
-              <a:ext uri="{28A0092B-C50C-407E-A947-70E740481C1C}">
-                <a14:useLocalDpi xmlns:a14="http://schemas.microsoft.com/office/drawing/2010/main" val="0"/>
-              </a:ext>
-            </a:extLst>
-          </a:blip>
-          <a:srcRect/>
-          <a:stretch>
-            <a:fillRect/>
-          </a:stretch>
-        </p:blipFill>
-        <p:spPr bwMode="auto">
-          <a:xfrm>
-            <a:off x="121137" y="3660085"/>
-            <a:ext cx="5779022" cy="2889511"/>
-          </a:xfrm>
-          <a:prstGeom prst="rect">
-            <a:avLst/>
-          </a:prstGeom>
-          <a:noFill/>
-          <a:extLst>
-            <a:ext uri="{909E8E84-426E-40DD-AFC4-6F175D3DCCD1}">
-              <a14:hiddenFill xmlns:a14="http://schemas.microsoft.com/office/drawing/2010/main">
-                <a:solidFill>
-                  <a:srgbClr val="FFFFFF"/>
-                </a:solidFill>
-              </a14:hiddenFill>
-            </a:ext>
-          </a:extLst>
-        </p:spPr>
-      </p:pic>
-      <p:sp>
-        <p:nvSpPr>
-          <p:cNvPr id="6" name="Прямоугольник 5"/>
-          <p:cNvSpPr/>
-          <p:nvPr/>
-        </p:nvSpPr>
-        <p:spPr>
-          <a:xfrm>
-            <a:off x="4023072" y="6364930"/>
-            <a:ext cx="4554645" cy="369332"/>
-          </a:xfrm>
-          <a:prstGeom prst="rect">
-            <a:avLst/>
-          </a:prstGeom>
-        </p:spPr>
-        <p:txBody>
-          <a:bodyPr wrap="none">
-            <a:spAutoFit/>
-          </a:bodyPr>
-          <a:lstStyle/>
-          <a:p>
-            <a:r>
-              <a:rPr lang="ru-RU" dirty="0"/>
-              <a:t>https://otexts.com/fpp3/simple-methods.html</a:t>
-            </a:r>
-          </a:p>
-        </p:txBody>
-      </p:sp>
-    </p:spTree>
-    <p:extLst>
-      <p:ext uri="{BB962C8B-B14F-4D97-AF65-F5344CB8AC3E}">
-        <p14:creationId xmlns:p14="http://schemas.microsoft.com/office/powerpoint/2010/main" val="2018149800"/>
-      </p:ext>
-    </p:extLst>
-  </p:cSld>
-  <p:clrMapOvr>
-    <a:masterClrMapping/>
-  </p:clrMapOvr>
-  <p:timing>
-    <p:tnLst>
-      <p:par>
-        <p:cTn id="1" dur="indefinite" restart="never" nodeType="tmRoot"/>
-      </p:par>
-    </p:tnLst>
-  </p:timing>
-</p:sld>
-</file>
-
-<file path=ppt/slides/slide11.xml><?xml version="1.0" encoding="utf-8"?>
-<p:sld xmlns:a="http://schemas.openxmlformats.org/drawingml/2006/main" xmlns:r="http://schemas.openxmlformats.org/officeDocument/2006/relationships" xmlns:p="http://schemas.openxmlformats.org/presentationml/2006/main">
-  <p:cSld>
-    <p:spTree>
-      <p:nvGrpSpPr>
-        <p:cNvPr id="1" name=""/>
-        <p:cNvGrpSpPr/>
-        <p:nvPr/>
-      </p:nvGrpSpPr>
-      <p:grpSpPr>
-        <a:xfrm>
-          <a:off x="0" y="0"/>
-          <a:ext cx="0" cy="0"/>
-          <a:chOff x="0" y="0"/>
-          <a:chExt cx="0" cy="0"/>
-        </a:xfrm>
-      </p:grpSpPr>
-      <p:sp>
-        <p:nvSpPr>
           <p:cNvPr id="2" name="Заголовок 1"/>
           <p:cNvSpPr>
             <a:spLocks noGrp="1"/>
@@ -4371,7 +4194,7 @@
           <p:nvPr>
             <p:extLst>
               <p:ext uri="{D42A27DB-BD31-4B8C-83A1-F6EECF244321}">
-                <p14:modId xmlns:p14="http://schemas.microsoft.com/office/powerpoint/2010/main" val="479910319"/>
+                <p14:modId xmlns:p14="http://schemas.microsoft.com/office/powerpoint/2010/main" val="61041937"/>
               </p:ext>
             </p:extLst>
           </p:nvPr>
@@ -4503,10 +4326,19 @@
                           </a:solidFill>
                           <a:effectLst/>
                         </a:rPr>
-                        <a:t> Prophet)</a:t>
-                      </a:r>
-                      <a:r>
-                        <a:rPr lang="ru-RU" sz="1600" b="1" u="none" strike="noStrike" dirty="0">
+                        <a:t> </a:t>
+                      </a:r>
+                      <a:r>
+                        <a:rPr lang="en-US" sz="1600" b="1" u="none" strike="noStrike" baseline="0" dirty="0" smtClean="0">
+                          <a:solidFill>
+                            <a:schemeClr val="bg1"/>
+                          </a:solidFill>
+                          <a:effectLst/>
+                        </a:rPr>
+                        <a:t>GAR)</a:t>
+                      </a:r>
+                      <a:r>
+                        <a:rPr lang="ru-RU" sz="1600" b="1" u="none" strike="noStrike" dirty="0" smtClean="0">
                           <a:solidFill>
                             <a:schemeClr val="bg1"/>
                           </a:solidFill>
@@ -4559,19 +4391,28 @@
                           </a:solidFill>
                           <a:effectLst/>
                         </a:rPr>
-                        <a:t> (</a:t>
-                      </a:r>
-                      <a:r>
-                        <a:rPr lang="ru-RU" sz="1900" b="1" u="none" strike="noStrike" dirty="0" err="1">
+                        <a:t> </a:t>
+                      </a:r>
+                      <a:r>
+                        <a:rPr lang="ru-RU" sz="1900" b="1" u="none" strike="noStrike" dirty="0" smtClean="0">
                           <a:solidFill>
                             <a:schemeClr val="bg1"/>
                           </a:solidFill>
                           <a:effectLst/>
                         </a:rPr>
-                        <a:t>XGBoost</a:t>
-                      </a:r>
-                      <a:r>
-                        <a:rPr lang="ru-RU" sz="1900" b="1" u="none" strike="noStrike" dirty="0">
+                        <a:t>(</a:t>
+                      </a:r>
+                      <a:r>
+                        <a:rPr lang="en-US" sz="1900" b="1" u="none" strike="noStrike" dirty="0" err="1" smtClean="0">
+                          <a:solidFill>
+                            <a:schemeClr val="bg1"/>
+                          </a:solidFill>
+                          <a:effectLst/>
+                        </a:rPr>
+                        <a:t>CatBoost</a:t>
+                      </a:r>
+                      <a:r>
+                        <a:rPr lang="ru-RU" sz="1900" b="1" u="none" strike="noStrike" dirty="0" smtClean="0">
                           <a:solidFill>
                             <a:schemeClr val="bg1"/>
                           </a:solidFill>
@@ -6516,7 +6357,7 @@
 </p:sld>
 </file>
 
-<file path=ppt/slides/slide12.xml><?xml version="1.0" encoding="utf-8"?>
+<file path=ppt/slides/slide11.xml><?xml version="1.0" encoding="utf-8"?>
 <p:sld xmlns:a="http://schemas.openxmlformats.org/drawingml/2006/main" xmlns:r="http://schemas.openxmlformats.org/officeDocument/2006/relationships" xmlns:p="http://schemas.openxmlformats.org/presentationml/2006/main">
   <p:cSld>
     <p:spTree>
@@ -6573,7 +6414,7 @@
             <p:ph idx="1"/>
             <p:extLst>
               <p:ext uri="{D42A27DB-BD31-4B8C-83A1-F6EECF244321}">
-                <p14:modId xmlns:p14="http://schemas.microsoft.com/office/powerpoint/2010/main" val="2977709626"/>
+                <p14:modId xmlns:p14="http://schemas.microsoft.com/office/powerpoint/2010/main" val="1956483266"/>
               </p:ext>
             </p:extLst>
           </p:nvPr>
@@ -8471,12 +8312,12 @@
                     <a:p>
                       <a:pPr algn="ctr" rtl="0" fontAlgn="ctr"/>
                       <a:r>
-                        <a:rPr lang="en-US" sz="1800" u="none" strike="noStrike">
-                          <a:effectLst/>
-                        </a:rPr>
-                        <a:t>Prophet</a:t>
-                      </a:r>
-                      <a:endParaRPr lang="en-US" sz="1800" b="1" i="0" u="none" strike="noStrike">
+                        <a:rPr lang="en-US" sz="1800" u="none" strike="noStrike" dirty="0" smtClean="0">
+                          <a:effectLst/>
+                        </a:rPr>
+                        <a:t>GAR</a:t>
+                      </a:r>
+                      <a:endParaRPr lang="en-US" sz="1800" b="1" i="0" u="none" strike="noStrike" dirty="0">
                         <a:solidFill>
                           <a:srgbClr val="FFFFFF"/>
                         </a:solidFill>
@@ -8575,12 +8416,12 @@
                     <a:p>
                       <a:pPr algn="ctr" rtl="0" fontAlgn="ctr"/>
                       <a:r>
-                        <a:rPr lang="ru-RU" sz="1800" u="none" strike="noStrike">
+                        <a:rPr lang="ru-RU" sz="1800" u="none" strike="noStrike" dirty="0">
                           <a:effectLst/>
                         </a:rPr>
                         <a:t>Слабый БГШ</a:t>
                       </a:r>
-                      <a:endParaRPr lang="ru-RU" sz="1800" b="0" i="0" u="none" strike="noStrike">
+                      <a:endParaRPr lang="ru-RU" sz="1800" b="0" i="0" u="none" strike="noStrike" dirty="0">
                         <a:solidFill>
                           <a:srgbClr val="000000"/>
                         </a:solidFill>
@@ -8984,7 +8825,7 @@
 </p:sld>
 </file>
 
-<file path=ppt/slides/slide13.xml><?xml version="1.0" encoding="utf-8"?>
+<file path=ppt/slides/slide12.xml><?xml version="1.0" encoding="utf-8"?>
 <p:sld xmlns:a="http://schemas.openxmlformats.org/drawingml/2006/main" xmlns:r="http://schemas.openxmlformats.org/officeDocument/2006/relationships" xmlns:p="http://schemas.openxmlformats.org/presentationml/2006/main">
   <p:cSld>
     <p:spTree>
@@ -9121,7 +8962,7 @@
 </file>
 
 <file path=ppt/slides/slide2.xml><?xml version="1.0" encoding="utf-8"?>
-<p:sld xmlns:a="http://schemas.openxmlformats.org/drawingml/2006/main" xmlns:r="http://schemas.openxmlformats.org/officeDocument/2006/relationships" xmlns:p="http://schemas.openxmlformats.org/presentationml/2006/main" show="0">
+<p:sld xmlns:a="http://schemas.openxmlformats.org/drawingml/2006/main" xmlns:r="http://schemas.openxmlformats.org/officeDocument/2006/relationships" xmlns:p="http://schemas.openxmlformats.org/presentationml/2006/main">
   <p:cSld>
     <p:spTree>
       <p:nvGrpSpPr>
@@ -9159,7 +9000,7 @@
           <a:p>
             <a:r>
               <a:rPr lang="ru-RU" dirty="0"/>
-              <a:t>Методы предсказания ВР</a:t>
+              <a:t>Методы предсказания в курсе</a:t>
             </a:r>
           </a:p>
         </p:txBody>
@@ -9176,7 +9017,7 @@
         </p:nvSpPr>
         <p:spPr>
           <a:xfrm>
-            <a:off x="73799" y="4717062"/>
+            <a:off x="73799" y="4534499"/>
             <a:ext cx="11563350" cy="1924051"/>
           </a:xfrm>
         </p:spPr>
@@ -9186,7 +9027,38 @@
           </a:bodyPr>
           <a:lstStyle/>
           <a:p>
-            <a:endParaRPr lang="ru-RU" sz="2200" dirty="0"/>
+            <a:r>
+              <a:rPr lang="ru-RU" sz="2200" dirty="0"/>
+              <a:t>Методы всегда выбираются</a:t>
+            </a:r>
+            <a:r>
+              <a:rPr lang="en-US" sz="2200" dirty="0"/>
+              <a:t> </a:t>
+            </a:r>
+            <a:r>
+              <a:rPr lang="ru-RU" sz="2200" dirty="0"/>
+              <a:t>от простых (слева) к самым сложным.</a:t>
+            </a:r>
+          </a:p>
+          <a:p>
+            <a:r>
+              <a:rPr lang="ru-RU" sz="2200" dirty="0"/>
+              <a:t>Выбор метода зависит от сложности ВР (число и связи компонент, </a:t>
+            </a:r>
+            <a:r>
+              <a:rPr lang="ru-RU" sz="2200" dirty="0" err="1"/>
+              <a:t>формализуемость</a:t>
+            </a:r>
+            <a:r>
+              <a:rPr lang="ru-RU" sz="2200" dirty="0"/>
+              <a:t> ВР) и требований к предсказанию (горизонт, точность)</a:t>
+            </a:r>
+          </a:p>
+          <a:p>
+            <a:r>
+              <a:rPr lang="ru-RU" sz="2200" dirty="0"/>
+              <a:t>Чем сложнее метод, тем он шире применим, но менее точен/менее устойчив/более склонен к переобучению, а также тем больше данных для обучения необходимо</a:t>
+            </a:r>
           </a:p>
         </p:txBody>
       </p:sp>
@@ -9213,237 +9085,122 @@
           </a:p>
         </p:txBody>
       </p:sp>
+      <p:sp>
+        <p:nvSpPr>
+          <p:cNvPr id="5" name="Прямоугольник 4"/>
+          <p:cNvSpPr/>
+          <p:nvPr/>
+        </p:nvSpPr>
+        <p:spPr>
+          <a:xfrm>
+            <a:off x="73799" y="6582975"/>
+            <a:ext cx="8060551" cy="276999"/>
+          </a:xfrm>
+          <a:prstGeom prst="rect">
+            <a:avLst/>
+          </a:prstGeom>
+        </p:spPr>
+        <p:txBody>
+          <a:bodyPr wrap="square">
+            <a:spAutoFit/>
+          </a:bodyPr>
+          <a:lstStyle/>
+          <a:p>
+            <a:r>
+              <a:rPr lang="ru-RU" sz="1200" dirty="0"/>
+              <a:t>https://fastercapital.com/content/Time-series-analysis-using-nonparametric-techniques--A-Fresh-Perspective.html</a:t>
+            </a:r>
+          </a:p>
+        </p:txBody>
+      </p:sp>
+      <p:sp>
+        <p:nvSpPr>
+          <p:cNvPr id="6" name="TextBox 5">
+            <a:extLst>
+              <a:ext uri="{FF2B5EF4-FFF2-40B4-BE49-F238E27FC236}">
+                <a16:creationId xmlns:a16="http://schemas.microsoft.com/office/drawing/2014/main" id="{2DB382E1-FD66-F7B2-B0CD-BCDC07F5F9B2}"/>
+              </a:ext>
+            </a:extLst>
+          </p:cNvPr>
+          <p:cNvSpPr txBox="1"/>
+          <p:nvPr/>
+        </p:nvSpPr>
+        <p:spPr>
+          <a:xfrm>
+            <a:off x="73799" y="6305976"/>
+            <a:ext cx="8893175" cy="276999"/>
+          </a:xfrm>
+          <a:prstGeom prst="rect">
+            <a:avLst/>
+          </a:prstGeom>
+          <a:noFill/>
+        </p:spPr>
+        <p:txBody>
+          <a:bodyPr wrap="square">
+            <a:spAutoFit/>
+          </a:bodyPr>
+          <a:lstStyle/>
+          <a:p>
+            <a:r>
+              <a:rPr lang="en-US" sz="1200" dirty="0" smtClean="0">
+                <a:hlinkClick r:id="rId2"/>
+              </a:rPr>
+              <a:t>https</a:t>
+            </a:r>
+            <a:r>
+              <a:rPr lang="en-US" sz="1200" dirty="0">
+                <a:hlinkClick r:id="rId2"/>
+              </a:rPr>
+              <a:t>://cs.hse.ru/mirror/pubs/share/1017921910.pdf</a:t>
+            </a:r>
+            <a:r>
+              <a:rPr lang="en-US" sz="1200" dirty="0"/>
+              <a:t> </a:t>
+            </a:r>
+            <a:endParaRPr lang="ru-RU" sz="1200" dirty="0"/>
+          </a:p>
+        </p:txBody>
+      </p:sp>
       <p:pic>
         <p:nvPicPr>
-          <p:cNvPr id="7" name="Picture 2" descr="https://i0.wp.com/semiengineering.com/wp-content/uploads/Fraunhofer_data-augmentation-industrial-AI-fig1.jpg?resize=605%2C155&amp;ssl=1"/>
+          <p:cNvPr id="10" name="Рисунок 9"/>
           <p:cNvPicPr>
-            <a:picLocks noChangeAspect="1" noChangeArrowheads="1"/>
+            <a:picLocks noChangeAspect="1"/>
           </p:cNvPicPr>
           <p:nvPr/>
         </p:nvPicPr>
         <p:blipFill>
-          <a:blip r:embed="rId2">
+          <a:blip r:embed="rId3">
             <a:extLst>
               <a:ext uri="{28A0092B-C50C-407E-A947-70E740481C1C}">
                 <a14:useLocalDpi xmlns:a14="http://schemas.microsoft.com/office/drawing/2010/main" val="0"/>
               </a:ext>
             </a:extLst>
           </a:blip>
-          <a:srcRect/>
           <a:stretch>
             <a:fillRect/>
           </a:stretch>
         </p:blipFill>
-        <p:spPr bwMode="auto">
-          <a:xfrm>
-            <a:off x="2519380" y="1098101"/>
-            <a:ext cx="5762625" cy="1476375"/>
-          </a:xfrm>
-          <a:prstGeom prst="rect">
-            <a:avLst/>
-          </a:prstGeom>
-          <a:noFill/>
-          <a:extLst>
-            <a:ext uri="{909E8E84-426E-40DD-AFC4-6F175D3DCCD1}">
-              <a14:hiddenFill xmlns:a14="http://schemas.microsoft.com/office/drawing/2010/main">
-                <a:solidFill>
-                  <a:srgbClr val="FFFFFF"/>
-                </a:solidFill>
-              </a14:hiddenFill>
-            </a:ext>
-          </a:extLst>
-        </p:spPr>
-      </p:pic>
-      <p:sp>
-        <p:nvSpPr>
-          <p:cNvPr id="8" name="Прямоугольник 7"/>
-          <p:cNvSpPr/>
-          <p:nvPr/>
-        </p:nvSpPr>
         <p:spPr>
           <a:xfrm>
-            <a:off x="2007646" y="6075144"/>
-            <a:ext cx="6096000" cy="646331"/>
+            <a:off x="2522338" y="1071543"/>
+            <a:ext cx="6666271" cy="3324456"/>
           </a:xfrm>
           <a:prstGeom prst="rect">
             <a:avLst/>
           </a:prstGeom>
         </p:spPr>
-        <p:txBody>
-          <a:bodyPr>
-            <a:spAutoFit/>
-          </a:bodyPr>
-          <a:lstStyle/>
-          <a:p>
-            <a:r>
-              <a:rPr lang="ru-RU" dirty="0"/>
-              <a:t>https://semiengineering.com/enhancing-datasets-for-artificial-intelligence-through-model-based-methods/</a:t>
-            </a:r>
-          </a:p>
-        </p:txBody>
-      </p:sp>
-      <p:sp>
-        <p:nvSpPr>
-          <p:cNvPr id="9" name="Прямоугольник 8"/>
-          <p:cNvSpPr/>
-          <p:nvPr/>
-        </p:nvSpPr>
-        <p:spPr>
-          <a:xfrm>
-            <a:off x="6517342" y="2389473"/>
-            <a:ext cx="3172609" cy="461473"/>
-          </a:xfrm>
-          <a:prstGeom prst="rect">
-            <a:avLst/>
-          </a:prstGeom>
-        </p:spPr>
-        <p:style>
-          <a:lnRef idx="2">
-            <a:schemeClr val="accent1">
-              <a:shade val="50000"/>
-            </a:schemeClr>
-          </a:lnRef>
-          <a:fillRef idx="1">
-            <a:schemeClr val="accent1"/>
-          </a:fillRef>
-          <a:effectRef idx="0">
-            <a:schemeClr val="accent1"/>
-          </a:effectRef>
-          <a:fontRef idx="minor">
-            <a:schemeClr val="lt1"/>
-          </a:fontRef>
-        </p:style>
-        <p:txBody>
-          <a:bodyPr rtlCol="0" anchor="ctr"/>
-          <a:lstStyle/>
-          <a:p>
-            <a:pPr algn="ctr"/>
-            <a:r>
-              <a:rPr lang="ru-RU" sz="1400" dirty="0"/>
-              <a:t>Бизнес процесс – </a:t>
-            </a:r>
-            <a:r>
-              <a:rPr lang="en-US" sz="1400" dirty="0"/>
-              <a:t>Prophet, </a:t>
-            </a:r>
-            <a:r>
-              <a:rPr lang="ru-RU" sz="1400" dirty="0"/>
-              <a:t> разложение и процесс</a:t>
-            </a:r>
-            <a:r>
-              <a:rPr lang="en-US" sz="1400" dirty="0"/>
-              <a:t>;</a:t>
-            </a:r>
-            <a:endParaRPr lang="ru-RU" sz="1400" dirty="0"/>
-          </a:p>
-        </p:txBody>
-      </p:sp>
-      <p:sp>
-        <p:nvSpPr>
-          <p:cNvPr id="10" name="Прямоугольник 9"/>
-          <p:cNvSpPr/>
-          <p:nvPr/>
-        </p:nvSpPr>
-        <p:spPr>
-          <a:xfrm>
-            <a:off x="4030516" y="2775989"/>
-            <a:ext cx="3172609" cy="461473"/>
-          </a:xfrm>
-          <a:prstGeom prst="rect">
-            <a:avLst/>
-          </a:prstGeom>
-        </p:spPr>
-        <p:style>
-          <a:lnRef idx="2">
-            <a:schemeClr val="accent1">
-              <a:shade val="50000"/>
-            </a:schemeClr>
-          </a:lnRef>
-          <a:fillRef idx="1">
-            <a:schemeClr val="accent1"/>
-          </a:fillRef>
-          <a:effectRef idx="0">
-            <a:schemeClr val="accent1"/>
-          </a:effectRef>
-          <a:fontRef idx="minor">
-            <a:schemeClr val="lt1"/>
-          </a:fontRef>
-        </p:style>
-        <p:txBody>
-          <a:bodyPr rtlCol="0" anchor="ctr"/>
-          <a:lstStyle/>
-          <a:p>
-            <a:pPr algn="ctr"/>
-            <a:r>
-              <a:rPr lang="en-US" sz="1400" dirty="0"/>
-              <a:t>Neural Prophet</a:t>
-            </a:r>
-            <a:endParaRPr lang="ru-RU" sz="1400" dirty="0"/>
-          </a:p>
-        </p:txBody>
-      </p:sp>
-      <p:sp>
-        <p:nvSpPr>
-          <p:cNvPr id="11" name="Прямоугольник 10"/>
-          <p:cNvSpPr/>
-          <p:nvPr/>
-        </p:nvSpPr>
-        <p:spPr>
-          <a:xfrm>
-            <a:off x="2090621" y="3102525"/>
-            <a:ext cx="3172609" cy="461473"/>
-          </a:xfrm>
-          <a:prstGeom prst="rect">
-            <a:avLst/>
-          </a:prstGeom>
-        </p:spPr>
-        <p:style>
-          <a:lnRef idx="2">
-            <a:schemeClr val="accent1">
-              <a:shade val="50000"/>
-            </a:schemeClr>
-          </a:lnRef>
-          <a:fillRef idx="1">
-            <a:schemeClr val="accent1"/>
-          </a:fillRef>
-          <a:effectRef idx="0">
-            <a:schemeClr val="accent1"/>
-          </a:effectRef>
-          <a:fontRef idx="minor">
-            <a:schemeClr val="lt1"/>
-          </a:fontRef>
-        </p:style>
-        <p:txBody>
-          <a:bodyPr rtlCol="0" anchor="ctr"/>
-          <a:lstStyle/>
-          <a:p>
-            <a:pPr algn="ctr"/>
-            <a:r>
-              <a:rPr lang="en-US" sz="1400" dirty="0"/>
-              <a:t>Neural Network</a:t>
-            </a:r>
-            <a:endParaRPr lang="ru-RU" sz="1400" dirty="0"/>
-          </a:p>
-        </p:txBody>
-      </p:sp>
+      </p:pic>
     </p:spTree>
     <p:extLst>
       <p:ext uri="{BB962C8B-B14F-4D97-AF65-F5344CB8AC3E}">
-        <p14:creationId xmlns:p14="http://schemas.microsoft.com/office/powerpoint/2010/main" val="1237223226"/>
+        <p14:creationId xmlns:p14="http://schemas.microsoft.com/office/powerpoint/2010/main" val="1609786843"/>
       </p:ext>
     </p:extLst>
   </p:cSld>
   <p:clrMapOvr>
     <a:masterClrMapping/>
   </p:clrMapOvr>
-  <mc:AlternateContent xmlns:mc="http://schemas.openxmlformats.org/markup-compatibility/2006" xmlns:p14="http://schemas.microsoft.com/office/powerpoint/2010/main">
-    <mc:Choice Requires="p14">
-      <p:transition spd="slow" p14:dur="2000"/>
-    </mc:Choice>
-    <mc:Fallback xmlns="">
-      <p:transition spd="slow"/>
-    </mc:Fallback>
-  </mc:AlternateContent>
   <p:timing>
     <p:tnLst>
       <p:par>
@@ -9483,74 +9240,19 @@
         </p:nvSpPr>
         <p:spPr>
           <a:xfrm>
-            <a:off x="495300" y="0"/>
-            <a:ext cx="10515600" cy="1325563"/>
-          </a:xfrm>
-        </p:spPr>
-        <p:txBody>
-          <a:bodyPr/>
-          <a:lstStyle/>
-          <a:p>
-            <a:r>
-              <a:rPr lang="ru-RU" dirty="0"/>
-              <a:t>Методы предсказания в курсе</a:t>
-            </a:r>
-          </a:p>
-        </p:txBody>
-      </p:sp>
-      <p:sp>
-        <p:nvSpPr>
-          <p:cNvPr id="3" name="Объект 2"/>
-          <p:cNvSpPr>
-            <a:spLocks noGrp="1"/>
-          </p:cNvSpPr>
-          <p:nvPr>
-            <p:ph idx="1"/>
-          </p:nvPr>
-        </p:nvSpPr>
-        <p:spPr>
-          <a:xfrm>
-            <a:off x="73799" y="4534499"/>
-            <a:ext cx="11563350" cy="1924051"/>
+            <a:off x="838200" y="365126"/>
+            <a:ext cx="10515600" cy="915988"/>
           </a:xfrm>
         </p:spPr>
         <p:txBody>
           <a:bodyPr>
-            <a:normAutofit/>
+            <a:normAutofit fontScale="90000"/>
           </a:bodyPr>
           <a:lstStyle/>
           <a:p>
             <a:r>
-              <a:rPr lang="ru-RU" sz="2200" dirty="0"/>
-              <a:t>Методы всегда выбираются</a:t>
-            </a:r>
-            <a:r>
-              <a:rPr lang="en-US" sz="2200" dirty="0"/>
-              <a:t> </a:t>
-            </a:r>
-            <a:r>
-              <a:rPr lang="ru-RU" sz="2200" dirty="0"/>
-              <a:t>от простых (слева) к самым сложным.</a:t>
-            </a:r>
-          </a:p>
-          <a:p>
-            <a:r>
-              <a:rPr lang="ru-RU" sz="2200" dirty="0"/>
-              <a:t>Выбор метода зависит от сложности ВР (число и связи компонент, </a:t>
-            </a:r>
-            <a:r>
-              <a:rPr lang="ru-RU" sz="2200" dirty="0" err="1"/>
-              <a:t>формализуемость</a:t>
-            </a:r>
-            <a:r>
-              <a:rPr lang="ru-RU" sz="2200" dirty="0"/>
-              <a:t> ВР) и требований к предсказанию (горизонт, точность)</a:t>
-            </a:r>
-          </a:p>
-          <a:p>
-            <a:r>
-              <a:rPr lang="ru-RU" sz="2200" dirty="0"/>
-              <a:t>Чем сложнее метод, тем он шире применим, но менее точен/менее устойчив/более склонен к переобучению, а также тем больше данных для обучения необходимо</a:t>
+              <a:rPr lang="ru-RU" dirty="0"/>
+              <a:t>Подходы к предсказанию временных рядов</a:t>
             </a:r>
           </a:p>
         </p:txBody>
@@ -9578,37 +9280,9 @@
           </a:p>
         </p:txBody>
       </p:sp>
-      <p:sp>
-        <p:nvSpPr>
-          <p:cNvPr id="5" name="Прямоугольник 4"/>
-          <p:cNvSpPr/>
-          <p:nvPr/>
-        </p:nvSpPr>
-        <p:spPr>
-          <a:xfrm>
-            <a:off x="73799" y="6582975"/>
-            <a:ext cx="8060551" cy="276999"/>
-          </a:xfrm>
-          <a:prstGeom prst="rect">
-            <a:avLst/>
-          </a:prstGeom>
-        </p:spPr>
-        <p:txBody>
-          <a:bodyPr wrap="square">
-            <a:spAutoFit/>
-          </a:bodyPr>
-          <a:lstStyle/>
-          <a:p>
-            <a:r>
-              <a:rPr lang="ru-RU" sz="1200" dirty="0"/>
-              <a:t>https://fastercapital.com/content/Time-series-analysis-using-nonparametric-techniques--A-Fresh-Perspective.html</a:t>
-            </a:r>
-          </a:p>
-        </p:txBody>
-      </p:sp>
       <p:pic>
         <p:nvPicPr>
-          <p:cNvPr id="7" name="Рисунок 6"/>
+          <p:cNvPr id="5" name="Рисунок 4"/>
           <p:cNvPicPr>
             <a:picLocks noChangeAspect="1"/>
           </p:cNvPicPr>
@@ -9622,8 +9296,8 @@
         </p:blipFill>
         <p:spPr>
           <a:xfrm>
-            <a:off x="2490649" y="1001486"/>
-            <a:ext cx="8024157" cy="3635213"/>
+            <a:off x="405590" y="1391261"/>
+            <a:ext cx="11542743" cy="3404590"/>
           </a:xfrm>
           <a:prstGeom prst="rect">
             <a:avLst/>
@@ -9632,25 +9306,18 @@
       </p:pic>
       <p:sp>
         <p:nvSpPr>
-          <p:cNvPr id="6" name="TextBox 5">
-            <a:extLst>
-              <a:ext uri="{FF2B5EF4-FFF2-40B4-BE49-F238E27FC236}">
-                <a16:creationId xmlns:a16="http://schemas.microsoft.com/office/drawing/2014/main" id="{2DB382E1-FD66-F7B2-B0CD-BCDC07F5F9B2}"/>
-              </a:ext>
-            </a:extLst>
-          </p:cNvPr>
-          <p:cNvSpPr txBox="1"/>
+          <p:cNvPr id="6" name="Прямоугольник 5"/>
+          <p:cNvSpPr/>
           <p:nvPr/>
         </p:nvSpPr>
         <p:spPr>
           <a:xfrm>
-            <a:off x="73799" y="6305976"/>
-            <a:ext cx="8893175" cy="276999"/>
+            <a:off x="838200" y="4905999"/>
+            <a:ext cx="10677525" cy="923330"/>
           </a:xfrm>
           <a:prstGeom prst="rect">
             <a:avLst/>
           </a:prstGeom>
-          <a:noFill/>
         </p:spPr>
         <p:txBody>
           <a:bodyPr wrap="square">
@@ -9659,81 +9326,87 @@
           <a:lstStyle/>
           <a:p>
             <a:r>
-              <a:rPr lang="ru-RU" sz="1200" dirty="0">
-                <a:hlinkClick r:id="rId3"/>
+              <a:rPr lang="en-US" dirty="0">
+                <a:solidFill>
+                  <a:srgbClr val="000000"/>
+                </a:solidFill>
+                <a:latin typeface="Calibri" panose="020F0502020204030204" pitchFamily="34" charset="0"/>
               </a:rPr>
-              <a:t>https://t.me/youknowds/10517</a:t>
-            </a:r>
-            <a:r>
-              <a:rPr lang="ru-RU" sz="1200" dirty="0"/>
-              <a:t> -</a:t>
-            </a:r>
-            <a:r>
-              <a:rPr lang="en-US" sz="1200" dirty="0"/>
-              <a:t>&gt; </a:t>
-            </a:r>
-            <a:r>
-              <a:rPr lang="en-US" sz="1200" dirty="0">
-                <a:hlinkClick r:id="rId4"/>
+              <a:t>Encoding (</a:t>
+            </a:r>
+            <a:r>
+              <a:rPr lang="ru-RU" dirty="0">
+                <a:solidFill>
+                  <a:srgbClr val="000000"/>
+                </a:solidFill>
+                <a:latin typeface="Calibri" panose="020F0502020204030204" pitchFamily="34" charset="0"/>
               </a:rPr>
-              <a:t>https://cs.hse.ru/mirror/pubs/share/1017921910.pdf</a:t>
-            </a:r>
-            <a:r>
-              <a:rPr lang="en-US" sz="1200" dirty="0"/>
-              <a:t> </a:t>
-            </a:r>
-            <a:endParaRPr lang="ru-RU" sz="1200" dirty="0"/>
+              <a:t>кодирование) — это процесс преобразования данных (в том числе категориальных или временных признаков) в числовую форму, удобную для обработки алгоритмами машинного обучения или статистическими методами.</a:t>
+            </a:r>
+            <a:endParaRPr lang="ru-RU" dirty="0"/>
           </a:p>
         </p:txBody>
       </p:sp>
-      <p:sp>
-        <p:nvSpPr>
-          <p:cNvPr id="8" name="Прямоугольник 7"/>
-          <p:cNvSpPr/>
+      <p:pic>
+        <p:nvPicPr>
+          <p:cNvPr id="7" name="Рисунок 6"/>
+          <p:cNvPicPr>
+            <a:picLocks noChangeAspect="1"/>
+          </p:cNvPicPr>
           <p:nvPr/>
-        </p:nvSpPr>
+        </p:nvPicPr>
+        <p:blipFill>
+          <a:blip r:embed="rId3"/>
+          <a:stretch>
+            <a:fillRect/>
+          </a:stretch>
+        </p:blipFill>
         <p:spPr>
           <a:xfrm>
-            <a:off x="9304020" y="3048000"/>
-            <a:ext cx="1082040" cy="220980"/>
+            <a:off x="3034285" y="5773400"/>
+            <a:ext cx="5450702" cy="865525"/>
           </a:xfrm>
           <a:prstGeom prst="rect">
             <a:avLst/>
           </a:prstGeom>
         </p:spPr>
-        <p:style>
-          <a:lnRef idx="2">
-            <a:schemeClr val="accent1">
-              <a:shade val="50000"/>
-            </a:schemeClr>
-          </a:lnRef>
-          <a:fillRef idx="1">
-            <a:schemeClr val="accent1"/>
-          </a:fillRef>
-          <a:effectRef idx="0">
-            <a:schemeClr val="accent1"/>
-          </a:effectRef>
-          <a:fontRef idx="minor">
-            <a:schemeClr val="lt1"/>
-          </a:fontRef>
-        </p:style>
+      </p:pic>
+      <p:sp>
+        <p:nvSpPr>
+          <p:cNvPr id="3" name="TextBox 2"/>
+          <p:cNvSpPr txBox="1"/>
+          <p:nvPr/>
+        </p:nvSpPr>
+        <p:spPr>
+          <a:xfrm>
+            <a:off x="1814656" y="4009646"/>
+            <a:ext cx="1219629" cy="369332"/>
+          </a:xfrm>
+          <a:prstGeom prst="rect">
+            <a:avLst/>
+          </a:prstGeom>
+          <a:solidFill>
+            <a:schemeClr val="bg1"/>
+          </a:solidFill>
+        </p:spPr>
         <p:txBody>
-          <a:bodyPr rtlCol="0" anchor="ctr"/>
+          <a:bodyPr wrap="none" rtlCol="0">
+            <a:spAutoFit/>
+          </a:bodyPr>
           <a:lstStyle/>
           <a:p>
-            <a:pPr algn="ctr"/>
-            <a:r>
-              <a:rPr lang="en-US" sz="1400" dirty="0" smtClean="0"/>
+            <a:r>
+              <a:rPr lang="en-US" dirty="0" smtClean="0"/>
               <a:t>foundation</a:t>
             </a:r>
-            <a:endParaRPr lang="ru-RU" sz="1400" dirty="0"/>
+            <a:endParaRPr lang="ru-RU" dirty="0"/>
           </a:p>
         </p:txBody>
       </p:sp>
     </p:spTree>
     <p:extLst>
       <p:ext uri="{BB962C8B-B14F-4D97-AF65-F5344CB8AC3E}">
-        <p14:creationId xmlns:p14="http://schemas.microsoft.com/office/powerpoint/2010/main" val="1609786843"/>
+        <p14:creationId xmlns:p14="http://schemas.microsoft.com/office/powerpoint/2010/main" val="190175357"/>
       </p:ext>
     </p:extLst>
   </p:cSld>
@@ -9779,186 +9452,6 @@
         </p:nvSpPr>
         <p:spPr>
           <a:xfrm>
-            <a:off x="838200" y="365126"/>
-            <a:ext cx="10515600" cy="915988"/>
-          </a:xfrm>
-        </p:spPr>
-        <p:txBody>
-          <a:bodyPr>
-            <a:normAutofit fontScale="90000"/>
-          </a:bodyPr>
-          <a:lstStyle/>
-          <a:p>
-            <a:r>
-              <a:rPr lang="ru-RU" dirty="0"/>
-              <a:t>Подходы к предсказанию временных рядов</a:t>
-            </a:r>
-          </a:p>
-        </p:txBody>
-      </p:sp>
-      <p:sp>
-        <p:nvSpPr>
-          <p:cNvPr id="4" name="Номер слайда 3"/>
-          <p:cNvSpPr>
-            <a:spLocks noGrp="1"/>
-          </p:cNvSpPr>
-          <p:nvPr>
-            <p:ph type="sldNum" sz="quarter" idx="12"/>
-          </p:nvPr>
-        </p:nvSpPr>
-        <p:spPr/>
-        <p:txBody>
-          <a:bodyPr/>
-          <a:lstStyle/>
-          <a:p>
-            <a:fld id="{45C3B737-A709-4ABC-AFE0-A6B067850C48}" type="slidenum">
-              <a:rPr lang="en-US" smtClean="0"/>
-              <a:t>4</a:t>
-            </a:fld>
-            <a:endParaRPr lang="en-US"/>
-          </a:p>
-        </p:txBody>
-      </p:sp>
-      <p:pic>
-        <p:nvPicPr>
-          <p:cNvPr id="5" name="Рисунок 4"/>
-          <p:cNvPicPr>
-            <a:picLocks noChangeAspect="1"/>
-          </p:cNvPicPr>
-          <p:nvPr/>
-        </p:nvPicPr>
-        <p:blipFill>
-          <a:blip r:embed="rId2"/>
-          <a:stretch>
-            <a:fillRect/>
-          </a:stretch>
-        </p:blipFill>
-        <p:spPr>
-          <a:xfrm>
-            <a:off x="408229" y="1366839"/>
-            <a:ext cx="11542743" cy="3404590"/>
-          </a:xfrm>
-          <a:prstGeom prst="rect">
-            <a:avLst/>
-          </a:prstGeom>
-        </p:spPr>
-      </p:pic>
-      <p:sp>
-        <p:nvSpPr>
-          <p:cNvPr id="6" name="Прямоугольник 5"/>
-          <p:cNvSpPr/>
-          <p:nvPr/>
-        </p:nvSpPr>
-        <p:spPr>
-          <a:xfrm>
-            <a:off x="838200" y="4905999"/>
-            <a:ext cx="10677525" cy="923330"/>
-          </a:xfrm>
-          <a:prstGeom prst="rect">
-            <a:avLst/>
-          </a:prstGeom>
-        </p:spPr>
-        <p:txBody>
-          <a:bodyPr wrap="square">
-            <a:spAutoFit/>
-          </a:bodyPr>
-          <a:lstStyle/>
-          <a:p>
-            <a:r>
-              <a:rPr lang="en-US" dirty="0">
-                <a:solidFill>
-                  <a:srgbClr val="000000"/>
-                </a:solidFill>
-                <a:latin typeface="Calibri" panose="020F0502020204030204" pitchFamily="34" charset="0"/>
-              </a:rPr>
-              <a:t>Encoding (</a:t>
-            </a:r>
-            <a:r>
-              <a:rPr lang="ru-RU" dirty="0">
-                <a:solidFill>
-                  <a:srgbClr val="000000"/>
-                </a:solidFill>
-                <a:latin typeface="Calibri" panose="020F0502020204030204" pitchFamily="34" charset="0"/>
-              </a:rPr>
-              <a:t>кодирование) — это процесс преобразования данных (в том числе категориальных или временных признаков) в числовую форму, удобную для обработки алгоритмами машинного обучения или статистическими методами.</a:t>
-            </a:r>
-            <a:endParaRPr lang="ru-RU" dirty="0"/>
-          </a:p>
-        </p:txBody>
-      </p:sp>
-      <p:pic>
-        <p:nvPicPr>
-          <p:cNvPr id="7" name="Рисунок 6"/>
-          <p:cNvPicPr>
-            <a:picLocks noChangeAspect="1"/>
-          </p:cNvPicPr>
-          <p:nvPr/>
-        </p:nvPicPr>
-        <p:blipFill>
-          <a:blip r:embed="rId3"/>
-          <a:stretch>
-            <a:fillRect/>
-          </a:stretch>
-        </p:blipFill>
-        <p:spPr>
-          <a:xfrm>
-            <a:off x="3034285" y="5773400"/>
-            <a:ext cx="5450702" cy="865525"/>
-          </a:xfrm>
-          <a:prstGeom prst="rect">
-            <a:avLst/>
-          </a:prstGeom>
-        </p:spPr>
-      </p:pic>
-    </p:spTree>
-    <p:extLst>
-      <p:ext uri="{BB962C8B-B14F-4D97-AF65-F5344CB8AC3E}">
-        <p14:creationId xmlns:p14="http://schemas.microsoft.com/office/powerpoint/2010/main" val="190175357"/>
-      </p:ext>
-    </p:extLst>
-  </p:cSld>
-  <p:clrMapOvr>
-    <a:masterClrMapping/>
-  </p:clrMapOvr>
-  <p:timing>
-    <p:tnLst>
-      <p:par>
-        <p:cTn id="1" dur="indefinite" restart="never" nodeType="tmRoot"/>
-      </p:par>
-    </p:tnLst>
-  </p:timing>
-</p:sld>
-</file>
-
-<file path=ppt/slides/slide5.xml><?xml version="1.0" encoding="utf-8"?>
-<p:sld xmlns:a="http://schemas.openxmlformats.org/drawingml/2006/main" xmlns:r="http://schemas.openxmlformats.org/officeDocument/2006/relationships" xmlns:p="http://schemas.openxmlformats.org/presentationml/2006/main">
-  <p:cSld>
-    <p:spTree>
-      <p:nvGrpSpPr>
-        <p:cNvPr id="1" name=""/>
-        <p:cNvGrpSpPr/>
-        <p:nvPr/>
-      </p:nvGrpSpPr>
-      <p:grpSpPr>
-        <a:xfrm>
-          <a:off x="0" y="0"/>
-          <a:ext cx="0" cy="0"/>
-          <a:chOff x="0" y="0"/>
-          <a:chExt cx="0" cy="0"/>
-        </a:xfrm>
-      </p:grpSpPr>
-      <p:sp>
-        <p:nvSpPr>
-          <p:cNvPr id="2" name="Заголовок 1"/>
-          <p:cNvSpPr>
-            <a:spLocks noGrp="1"/>
-          </p:cNvSpPr>
-          <p:nvPr>
-            <p:ph type="title"/>
-          </p:nvPr>
-        </p:nvSpPr>
-        <p:spPr>
-          <a:xfrm>
             <a:off x="320040" y="258445"/>
             <a:ext cx="11033760" cy="587375"/>
           </a:xfrm>
@@ -10028,30 +9521,6 @@
           </a:p>
         </p:txBody>
       </p:sp>
-      <p:pic>
-        <p:nvPicPr>
-          <p:cNvPr id="4" name="Рисунок 3"/>
-          <p:cNvPicPr>
-            <a:picLocks noChangeAspect="1"/>
-          </p:cNvPicPr>
-          <p:nvPr/>
-        </p:nvPicPr>
-        <p:blipFill>
-          <a:blip r:embed="rId2"/>
-          <a:stretch>
-            <a:fillRect/>
-          </a:stretch>
-        </p:blipFill>
-        <p:spPr>
-          <a:xfrm>
-            <a:off x="2442550" y="747822"/>
-            <a:ext cx="7796825" cy="3426877"/>
-          </a:xfrm>
-          <a:prstGeom prst="rect">
-            <a:avLst/>
-          </a:prstGeom>
-        </p:spPr>
-      </p:pic>
       <p:sp>
         <p:nvSpPr>
           <p:cNvPr id="5" name="Объект 2"/>
@@ -10269,6 +9738,36 @@
           </a:p>
         </p:txBody>
       </p:sp>
+      <p:pic>
+        <p:nvPicPr>
+          <p:cNvPr id="6" name="Рисунок 5"/>
+          <p:cNvPicPr>
+            <a:picLocks noChangeAspect="1"/>
+          </p:cNvPicPr>
+          <p:nvPr/>
+        </p:nvPicPr>
+        <p:blipFill>
+          <a:blip r:embed="rId2" cstate="hqprint">
+            <a:extLst>
+              <a:ext uri="{28A0092B-C50C-407E-A947-70E740481C1C}">
+                <a14:useLocalDpi xmlns:a14="http://schemas.microsoft.com/office/drawing/2010/main" val="0"/>
+              </a:ext>
+            </a:extLst>
+          </a:blip>
+          <a:stretch>
+            <a:fillRect/>
+          </a:stretch>
+        </p:blipFill>
+        <p:spPr>
+          <a:xfrm>
+            <a:off x="2664542" y="845820"/>
+            <a:ext cx="5705475" cy="2845308"/>
+          </a:xfrm>
+          <a:prstGeom prst="rect">
+            <a:avLst/>
+          </a:prstGeom>
+        </p:spPr>
+      </p:pic>
     </p:spTree>
     <p:extLst>
       <p:ext uri="{BB962C8B-B14F-4D97-AF65-F5344CB8AC3E}">
@@ -10289,7 +9788,7 @@
 </p:sld>
 </file>
 
-<file path=ppt/slides/slide6.xml><?xml version="1.0" encoding="utf-8"?>
+<file path=ppt/slides/slide5.xml><?xml version="1.0" encoding="utf-8"?>
 <p:sld xmlns:a="http://schemas.openxmlformats.org/drawingml/2006/main" xmlns:r="http://schemas.openxmlformats.org/officeDocument/2006/relationships" xmlns:p="http://schemas.openxmlformats.org/presentationml/2006/main">
   <p:cSld>
     <p:spTree>
@@ -10347,11 +9846,16 @@
           </p:cNvGraphicFramePr>
           <p:nvPr>
             <p:ph idx="1"/>
+            <p:extLst>
+              <p:ext uri="{D42A27DB-BD31-4B8C-83A1-F6EECF244321}">
+                <p14:modId xmlns:p14="http://schemas.microsoft.com/office/powerpoint/2010/main" val="1840764017"/>
+              </p:ext>
+            </p:extLst>
           </p:nvPr>
         </p:nvGraphicFramePr>
         <p:xfrm>
           <a:off x="228598" y="1401333"/>
-          <a:ext cx="11671666" cy="4494123"/>
+          <a:ext cx="11671666" cy="4576737"/>
         </p:xfrm>
         <a:graphic>
           <a:graphicData uri="http://schemas.openxmlformats.org/drawingml/2006/table">
@@ -11598,7 +11102,7 @@
                         <a:t> </a:t>
                       </a:r>
                       <a:r>
-                        <a:rPr lang="en-US" sz="1700" b="0" i="0" kern="1200" dirty="0">
+                        <a:rPr lang="en-US" sz="1700" b="0" i="0" kern="1200" dirty="0" smtClean="0">
                           <a:solidFill>
                             <a:schemeClr val="dk1"/>
                           </a:solidFill>
@@ -11607,7 +11111,7 @@
                           <a:ea typeface="+mn-ea"/>
                           <a:cs typeface="+mn-cs"/>
                         </a:rPr>
-                        <a:t>Prophet</a:t>
+                        <a:t>GAR</a:t>
                       </a:r>
                       <a:endParaRPr lang="ru-RU" sz="1700" dirty="0">
                         <a:effectLst/>
@@ -12541,7 +12045,7 @@
           <a:p>
             <a:fld id="{45C3B737-A709-4ABC-AFE0-A6B067850C48}" type="slidenum">
               <a:rPr lang="en-US" smtClean="0"/>
-              <a:t>6</a:t>
+              <a:t>5</a:t>
             </a:fld>
             <a:endParaRPr lang="en-US"/>
           </a:p>
@@ -12777,7 +12281,7 @@
 </p:sld>
 </file>
 
-<file path=ppt/slides/slide7.xml><?xml version="1.0" encoding="utf-8"?>
+<file path=ppt/slides/slide6.xml><?xml version="1.0" encoding="utf-8"?>
 <p:sld xmlns:a="http://schemas.openxmlformats.org/drawingml/2006/main" xmlns:r="http://schemas.openxmlformats.org/officeDocument/2006/relationships" xmlns:p="http://schemas.openxmlformats.org/presentationml/2006/main">
   <p:cSld>
     <p:spTree>
@@ -15336,7 +14840,7 @@
           <a:p>
             <a:fld id="{45C3B737-A709-4ABC-AFE0-A6B067850C48}" type="slidenum">
               <a:rPr lang="en-US" smtClean="0"/>
-              <a:t>7</a:t>
+              <a:t>6</a:t>
             </a:fld>
             <a:endParaRPr lang="en-US" dirty="0"/>
           </a:p>
@@ -15558,7 +15062,7 @@
 </p:sld>
 </file>
 
-<file path=ppt/slides/slide8.xml><?xml version="1.0" encoding="utf-8"?>
+<file path=ppt/slides/slide7.xml><?xml version="1.0" encoding="utf-8"?>
 <p:sld xmlns:a="http://schemas.openxmlformats.org/drawingml/2006/main" xmlns:r="http://schemas.openxmlformats.org/officeDocument/2006/relationships" xmlns:p="http://schemas.openxmlformats.org/presentationml/2006/main">
   <p:cSld>
     <p:spTree>
@@ -15621,7 +15125,7 @@
           <a:p>
             <a:fld id="{45C3B737-A709-4ABC-AFE0-A6B067850C48}" type="slidenum">
               <a:rPr lang="en-US" smtClean="0"/>
-              <a:t>8</a:t>
+              <a:t>7</a:t>
             </a:fld>
             <a:endParaRPr lang="en-US"/>
           </a:p>
@@ -15640,154 +15144,154 @@
         <p:spPr>
           <a:xfrm>
             <a:off x="313509" y="966652"/>
-            <a:ext cx="11040291" cy="5210311"/>
+            <a:ext cx="11632685" cy="5210311"/>
           </a:xfrm>
         </p:spPr>
         <p:txBody>
-          <a:bodyPr/>
+          <a:bodyPr>
+            <a:normAutofit/>
+          </a:bodyPr>
           <a:lstStyle/>
           <a:p>
             <a:r>
-              <a:rPr lang="en-US" dirty="0"/>
-              <a:t>ARIMA, ETS</a:t>
-            </a:r>
-            <a:r>
-              <a:rPr lang="en-US"/>
-              <a:t>, Prophet  </a:t>
-            </a:r>
-            <a:r>
-              <a:rPr lang="ru-RU" dirty="0" err="1"/>
+              <a:rPr lang="en-US" sz="2400" dirty="0"/>
+              <a:t>ARIMA, ETS, </a:t>
+            </a:r>
+            <a:r>
+              <a:rPr lang="en-US" sz="2400" dirty="0" smtClean="0"/>
+              <a:t>GAR  </a:t>
+            </a:r>
+            <a:r>
+              <a:rPr lang="ru-RU" sz="2400" dirty="0" err="1"/>
               <a:t>бейзлайны</a:t>
             </a:r>
             <a:r>
-              <a:rPr lang="ru-RU" dirty="0"/>
+              <a:rPr lang="ru-RU" sz="2400" dirty="0"/>
               <a:t> + </a:t>
             </a:r>
             <a:r>
-              <a:rPr lang="en-US" dirty="0"/>
+              <a:rPr lang="en-US" sz="2400" dirty="0"/>
               <a:t>LSTM </a:t>
             </a:r>
             <a:r>
-              <a:rPr lang="ru-RU" dirty="0"/>
-              <a:t>(для многомерных ВР)</a:t>
-            </a:r>
-          </a:p>
-          <a:p>
-            <a:r>
-              <a:rPr lang="ru-RU" dirty="0"/>
+              <a:rPr lang="ru-RU" sz="2400" dirty="0"/>
+              <a:t>(для многомерных ВР</a:t>
+            </a:r>
+            <a:r>
+              <a:rPr lang="ru-RU" sz="2400" dirty="0" smtClean="0"/>
+              <a:t>)</a:t>
+            </a:r>
+            <a:r>
+              <a:rPr lang="en-US" sz="2400" dirty="0" smtClean="0"/>
+              <a:t>+LGBM </a:t>
+            </a:r>
+            <a:r>
+              <a:rPr lang="ru-RU" sz="2400" dirty="0" smtClean="0"/>
+              <a:t>(для сложных ВР)</a:t>
+            </a:r>
+            <a:endParaRPr lang="ru-RU" sz="2400" dirty="0"/>
+          </a:p>
+          <a:p>
+            <a:r>
+              <a:rPr lang="ru-RU" sz="2400" dirty="0"/>
               <a:t>Часто необходимо вероятностное </a:t>
             </a:r>
             <a:r>
-              <a:rPr lang="ru-RU" dirty="0" err="1"/>
+              <a:rPr lang="ru-RU" sz="2400" dirty="0" err="1"/>
               <a:t>прогназирование</a:t>
             </a:r>
-            <a:endParaRPr lang="ru-RU" dirty="0"/>
-          </a:p>
-          <a:p>
-            <a:r>
-              <a:rPr lang="ru-RU" dirty="0"/>
+            <a:endParaRPr lang="ru-RU" sz="2400" dirty="0"/>
+          </a:p>
+          <a:p>
+            <a:r>
+              <a:rPr lang="ru-RU" sz="2400" dirty="0"/>
               <a:t>Для коротких горизонтов и простых ВР стат. Методы работают отлично даже для </a:t>
             </a:r>
             <a:r>
-              <a:rPr lang="ru-RU" dirty="0" err="1"/>
+              <a:rPr lang="ru-RU" sz="2400" dirty="0" err="1"/>
               <a:t>многопеременных</a:t>
             </a:r>
             <a:r>
-              <a:rPr lang="ru-RU" dirty="0"/>
+              <a:rPr lang="ru-RU" sz="2400" dirty="0"/>
               <a:t> ВР</a:t>
             </a:r>
           </a:p>
           <a:p>
             <a:r>
-              <a:rPr lang="ru-RU" dirty="0"/>
+              <a:rPr lang="ru-RU" sz="2400" dirty="0"/>
               <a:t>Для более сложных ВР гибридные методы: </a:t>
             </a:r>
             <a:r>
-              <a:rPr lang="ru-RU" dirty="0" err="1"/>
+              <a:rPr lang="ru-RU" sz="2400" dirty="0" err="1"/>
               <a:t>стат.методы</a:t>
             </a:r>
             <a:r>
-              <a:rPr lang="ru-RU" dirty="0"/>
+              <a:rPr lang="ru-RU" sz="2400" dirty="0"/>
               <a:t> + </a:t>
             </a:r>
             <a:r>
-              <a:rPr lang="en-US" dirty="0"/>
+              <a:rPr lang="en-US" sz="2400" dirty="0"/>
               <a:t>DL </a:t>
             </a:r>
           </a:p>
           <a:p>
             <a:r>
-              <a:rPr lang="ru-RU" dirty="0"/>
+              <a:rPr lang="ru-RU" sz="2400" dirty="0"/>
               <a:t>Для средних горизонтов </a:t>
             </a:r>
             <a:r>
-              <a:rPr lang="en-US" dirty="0"/>
+              <a:rPr lang="en-US" sz="2400" dirty="0"/>
               <a:t>DL </a:t>
             </a:r>
             <a:r>
-              <a:rPr lang="ru-RU" dirty="0"/>
+              <a:rPr lang="ru-RU" sz="2400" dirty="0"/>
               <a:t>можно заменить на </a:t>
             </a:r>
             <a:r>
-              <a:rPr lang="en-US" dirty="0"/>
+              <a:rPr lang="en-US" sz="2400" dirty="0"/>
               <a:t>ML </a:t>
             </a:r>
             <a:r>
-              <a:rPr lang="ru-RU" dirty="0"/>
+              <a:rPr lang="ru-RU" sz="2400" dirty="0"/>
               <a:t>с инженерией признаков</a:t>
             </a:r>
           </a:p>
           <a:p>
             <a:r>
-              <a:rPr lang="ru-RU" dirty="0"/>
+              <a:rPr lang="ru-RU" sz="2400" dirty="0"/>
               <a:t>Для длинных горизонтов и сложных ВР – </a:t>
             </a:r>
             <a:r>
-              <a:rPr lang="en-US" dirty="0"/>
+              <a:rPr lang="en-US" sz="2400" dirty="0"/>
               <a:t>DL </a:t>
             </a:r>
             <a:r>
-              <a:rPr lang="ru-RU" dirty="0"/>
+              <a:rPr lang="ru-RU" sz="2400" dirty="0"/>
               <a:t>(</a:t>
             </a:r>
             <a:r>
-              <a:rPr lang="ru-RU" dirty="0" err="1"/>
+              <a:rPr lang="ru-RU" sz="2400" dirty="0" err="1"/>
               <a:t>трансфомеры</a:t>
             </a:r>
             <a:r>
-              <a:rPr lang="ru-RU" dirty="0"/>
+              <a:rPr lang="ru-RU" sz="2400" dirty="0"/>
               <a:t>, современные </a:t>
             </a:r>
             <a:r>
-              <a:rPr lang="en-US" dirty="0"/>
+              <a:rPr lang="en-US" sz="2400" dirty="0"/>
               <a:t>RNN)</a:t>
             </a:r>
           </a:p>
           <a:p>
             <a:r>
-              <a:rPr lang="ru-RU" dirty="0"/>
+              <a:rPr lang="ru-RU" sz="2400" dirty="0"/>
               <a:t>Для больших объемов ВР и длинных горизонтов </a:t>
             </a:r>
             <a:r>
-              <a:rPr lang="en-US" dirty="0"/>
-              <a:t>LLM</a:t>
-            </a:r>
-            <a:endParaRPr lang="ru-RU" dirty="0"/>
-          </a:p>
-          <a:p>
-            <a:r>
-              <a:rPr lang="en-US" dirty="0"/>
-              <a:t>SOTA: </a:t>
-            </a:r>
-            <a:r>
-              <a:rPr lang="ru-RU" dirty="0"/>
-              <a:t>вероятностное прогнозирование при помощи </a:t>
-            </a:r>
-            <a:r>
-              <a:rPr lang="en-US" dirty="0"/>
-              <a:t>LLM</a:t>
-            </a:r>
-            <a:endParaRPr lang="ru-RU" dirty="0"/>
+              <a:rPr lang="en-US" sz="2400" dirty="0" smtClean="0"/>
+              <a:t>DL/Foundation</a:t>
+            </a:r>
+            <a:endParaRPr lang="ru-RU" sz="2400" dirty="0"/>
           </a:p>
         </p:txBody>
       </p:sp>
@@ -15811,7 +15315,7 @@
 </p:sld>
 </file>
 
-<file path=ppt/slides/slide9.xml><?xml version="1.0" encoding="utf-8"?>
+<file path=ppt/slides/slide8.xml><?xml version="1.0" encoding="utf-8"?>
 <p:sld xmlns:a="http://schemas.openxmlformats.org/drawingml/2006/main" xmlns:r="http://schemas.openxmlformats.org/officeDocument/2006/relationships" xmlns:p="http://schemas.openxmlformats.org/presentationml/2006/main">
   <p:cSld>
     <p:spTree>
@@ -17009,6 +16513,189 @@
 </p:sld>
 </file>
 
+<file path=ppt/slides/slide9.xml><?xml version="1.0" encoding="utf-8"?>
+<p:sld xmlns:a="http://schemas.openxmlformats.org/drawingml/2006/main" xmlns:r="http://schemas.openxmlformats.org/officeDocument/2006/relationships" xmlns:p="http://schemas.openxmlformats.org/presentationml/2006/main">
+  <p:cSld>
+    <p:spTree>
+      <p:nvGrpSpPr>
+        <p:cNvPr id="1" name=""/>
+        <p:cNvGrpSpPr/>
+        <p:nvPr/>
+      </p:nvGrpSpPr>
+      <p:grpSpPr>
+        <a:xfrm>
+          <a:off x="0" y="0"/>
+          <a:ext cx="0" cy="0"/>
+          <a:chOff x="0" y="0"/>
+          <a:chExt cx="0" cy="0"/>
+        </a:xfrm>
+      </p:grpSpPr>
+      <p:sp>
+        <p:nvSpPr>
+          <p:cNvPr id="2" name="Заголовок 1">
+            <a:extLst>
+              <a:ext uri="{FF2B5EF4-FFF2-40B4-BE49-F238E27FC236}">
+                <a16:creationId xmlns:a16="http://schemas.microsoft.com/office/drawing/2014/main" id="{3FB6B433-AB20-4BD4-8E77-84B856A5D608}"/>
+              </a:ext>
+            </a:extLst>
+          </p:cNvPr>
+          <p:cNvSpPr>
+            <a:spLocks noGrp="1"/>
+          </p:cNvSpPr>
+          <p:nvPr>
+            <p:ph type="title"/>
+          </p:nvPr>
+        </p:nvSpPr>
+        <p:spPr>
+          <a:xfrm>
+            <a:off x="323849" y="161366"/>
+            <a:ext cx="10515600" cy="806450"/>
+          </a:xfrm>
+        </p:spPr>
+        <p:txBody>
+          <a:bodyPr>
+            <a:normAutofit/>
+          </a:bodyPr>
+          <a:lstStyle/>
+          <a:p>
+            <a:pPr algn="ctr"/>
+            <a:r>
+              <a:rPr lang="ru-RU" b="1" dirty="0"/>
+              <a:t>Наивное предсказание </a:t>
+            </a:r>
+          </a:p>
+        </p:txBody>
+      </p:sp>
+      <p:pic>
+        <p:nvPicPr>
+          <p:cNvPr id="1026" name="Picture 2" descr="Forecasts of Australian quarterly beer production."/>
+          <p:cNvPicPr>
+            <a:picLocks noChangeAspect="1" noChangeArrowheads="1"/>
+          </p:cNvPicPr>
+          <p:nvPr/>
+        </p:nvPicPr>
+        <p:blipFill>
+          <a:blip r:embed="rId3">
+            <a:extLst>
+              <a:ext uri="{28A0092B-C50C-407E-A947-70E740481C1C}">
+                <a14:useLocalDpi xmlns:a14="http://schemas.microsoft.com/office/drawing/2010/main" val="0"/>
+              </a:ext>
+            </a:extLst>
+          </a:blip>
+          <a:srcRect/>
+          <a:stretch>
+            <a:fillRect/>
+          </a:stretch>
+        </p:blipFill>
+        <p:spPr bwMode="auto">
+          <a:xfrm>
+            <a:off x="5381625" y="967816"/>
+            <a:ext cx="6661150" cy="3330575"/>
+          </a:xfrm>
+          <a:prstGeom prst="rect">
+            <a:avLst/>
+          </a:prstGeom>
+          <a:noFill/>
+          <a:extLst>
+            <a:ext uri="{909E8E84-426E-40DD-AFC4-6F175D3DCCD1}">
+              <a14:hiddenFill xmlns:a14="http://schemas.microsoft.com/office/drawing/2010/main">
+                <a:solidFill>
+                  <a:srgbClr val="FFFFFF"/>
+                </a:solidFill>
+              </a14:hiddenFill>
+            </a:ext>
+          </a:extLst>
+        </p:spPr>
+      </p:pic>
+      <p:pic>
+        <p:nvPicPr>
+          <p:cNvPr id="1028" name="Picture 4" descr="Forecasts based on Google's daily closing stock price in 2015."/>
+          <p:cNvPicPr>
+            <a:picLocks noChangeAspect="1" noChangeArrowheads="1"/>
+          </p:cNvPicPr>
+          <p:nvPr/>
+        </p:nvPicPr>
+        <p:blipFill>
+          <a:blip r:embed="rId4">
+            <a:extLst>
+              <a:ext uri="{28A0092B-C50C-407E-A947-70E740481C1C}">
+                <a14:useLocalDpi xmlns:a14="http://schemas.microsoft.com/office/drawing/2010/main" val="0"/>
+              </a:ext>
+            </a:extLst>
+          </a:blip>
+          <a:srcRect/>
+          <a:stretch>
+            <a:fillRect/>
+          </a:stretch>
+        </p:blipFill>
+        <p:spPr bwMode="auto">
+          <a:xfrm>
+            <a:off x="121137" y="3660085"/>
+            <a:ext cx="5779022" cy="2889511"/>
+          </a:xfrm>
+          <a:prstGeom prst="rect">
+            <a:avLst/>
+          </a:prstGeom>
+          <a:noFill/>
+          <a:extLst>
+            <a:ext uri="{909E8E84-426E-40DD-AFC4-6F175D3DCCD1}">
+              <a14:hiddenFill xmlns:a14="http://schemas.microsoft.com/office/drawing/2010/main">
+                <a:solidFill>
+                  <a:srgbClr val="FFFFFF"/>
+                </a:solidFill>
+              </a14:hiddenFill>
+            </a:ext>
+          </a:extLst>
+        </p:spPr>
+      </p:pic>
+      <p:sp>
+        <p:nvSpPr>
+          <p:cNvPr id="6" name="Прямоугольник 5"/>
+          <p:cNvSpPr/>
+          <p:nvPr/>
+        </p:nvSpPr>
+        <p:spPr>
+          <a:xfrm>
+            <a:off x="4023072" y="6364930"/>
+            <a:ext cx="4554645" cy="369332"/>
+          </a:xfrm>
+          <a:prstGeom prst="rect">
+            <a:avLst/>
+          </a:prstGeom>
+        </p:spPr>
+        <p:txBody>
+          <a:bodyPr wrap="none">
+            <a:spAutoFit/>
+          </a:bodyPr>
+          <a:lstStyle/>
+          <a:p>
+            <a:r>
+              <a:rPr lang="ru-RU" dirty="0"/>
+              <a:t>https://otexts.com/fpp3/simple-methods.html</a:t>
+            </a:r>
+          </a:p>
+        </p:txBody>
+      </p:sp>
+    </p:spTree>
+    <p:extLst>
+      <p:ext uri="{BB962C8B-B14F-4D97-AF65-F5344CB8AC3E}">
+        <p14:creationId xmlns:p14="http://schemas.microsoft.com/office/powerpoint/2010/main" val="2018149800"/>
+      </p:ext>
+    </p:extLst>
+  </p:cSld>
+  <p:clrMapOvr>
+    <a:masterClrMapping/>
+  </p:clrMapOvr>
+  <p:timing>
+    <p:tnLst>
+      <p:par>
+        <p:cTn id="1" dur="indefinite" restart="never" nodeType="tmRoot"/>
+      </p:par>
+    </p:tnLst>
+  </p:timing>
+</p:sld>
+</file>
+
 <file path=ppt/theme/theme1.xml><?xml version="1.0" encoding="utf-8"?>
 <a:theme xmlns:a="http://schemas.openxmlformats.org/drawingml/2006/main" name="Тема Office">
   <a:themeElements>
